--- a/E1 - EDA/E1_EDA_Presentacion_og.pptx
+++ b/E1 - EDA/E1_EDA_Presentacion_og.pptx
@@ -1944,14 +1944,14 @@
           <p:nvPr>
             <p:extLst>
               <p:ext uri="{D42A27DB-BD31-4B8C-83A1-F6EECF244321}">
-                <p14:modId xmlns:p14="http://schemas.microsoft.com/office/powerpoint/2010/main" val="1579011935"/>
+                <p14:modId xmlns:p14="http://schemas.microsoft.com/office/powerpoint/2010/main" val="1931142945"/>
               </p:ext>
             </p:extLst>
           </p:nvPr>
         </p:nvGraphicFramePr>
         <p:xfrm>
           <a:off x="640080" y="1874520"/>
-          <a:ext cx="6949440" cy="914400"/>
+          <a:ext cx="6949440" cy="3950208"/>
         </p:xfrm>
         <a:graphic>
           <a:graphicData uri="http://schemas.openxmlformats.org/drawingml/2006/table">
@@ -3118,10 +3118,10 @@
                             <a:srgbClr val="8D857A"/>
                           </a:solidFill>
                           <a:latin typeface="Courier New" pitchFamily="34" charset="0"/>
-                          <a:ea typeface="Courier New" pitchFamily="34" charset="-122"/>
+                          <a:ea typeface="Courier New" charset="0"/>
                           <a:cs typeface="Courier New" pitchFamily="34" charset="-120"/>
                         </a:rPr>
-                        <a:t>—</a:t>
+                        <a:t>393</a:t>
                       </a:r>
                       <a:endParaRPr lang="en-US" sz="1400" dirty="0">
                         <a:latin typeface="Courier New" charset="0"/>
